--- a/presentations/06_UAE_Wills_Inheritance_Statistics_EN.pptx
+++ b/presentations/06_UAE_Wills_Inheritance_Statistics_EN.pptx
@@ -132,20 +132,20 @@
   <p:extLst>
     <p:ext uri="{521415D9-36F7-43E2-AB2F-B90AF26B5E84}">
       <p14:sectionLst xmlns:p14="http://schemas.microsoft.com/office/powerpoint/2010/main">
-        <p14:section name="Introduction" id="{ea9c427b-25ef-4d40-f97f-db80cd5e266a}">
+        <p14:section name="Introduction" id="{83cc0e1b-3a69-30d9-b059-d20c6580c931}">
           <p14:sldIdLst>
             <p14:sldId id="256"/>
             <p14:sldId id="257"/>
             <p14:sldId id="258"/>
           </p14:sldIdLst>
         </p14:section>
-        <p14:section name="Context" id="{6111d601-267e-c156-b4a5-1b4bddcf9a58}">
+        <p14:section name="Context" id="{ef3a0b54-7c8a-8cfd-1f7d-1cedb7549539}">
           <p14:sldIdLst>
             <p14:sldId id="259"/>
             <p14:sldId id="260"/>
           </p14:sldIdLst>
         </p14:section>
-        <p14:section name="Who has a will" id="{54f37e16-aac2-4f11-7fe8-de39670996ce}">
+        <p14:section name="Who has a will" id="{1edc1789-a872-a662-95a9-d191244bcfba}">
           <p14:sldIdLst>
             <p14:sldId id="261"/>
             <p14:sldId id="262"/>
@@ -156,7 +156,7 @@
             <p14:sldId id="267"/>
           </p14:sldIdLst>
         </p14:section>
-        <p14:section name="Speed and problems" id="{742263fa-2c47-b125-7641-5cdb52203332}">
+        <p14:section name="Speed and problems" id="{2bf7b067-4d94-b2ae-5cf4-3f5ec58ebd2c}">
           <p14:sldIdLst>
             <p14:sldId id="268"/>
             <p14:sldId id="269"/>
@@ -165,7 +165,7 @@
             <p14:sldId id="272"/>
           </p14:sldIdLst>
         </p14:section>
-        <p14:section name="Companies" id="{8da8a008-dc87-9bbf-e585-b5e4732e0c19}">
+        <p14:section name="Companies" id="{e109a78d-e683-2de9-5ff3-d409d51bb54e}">
           <p14:sldIdLst>
             <p14:sldId id="273"/>
             <p14:sldId id="274"/>
@@ -173,7 +173,7 @@
             <p14:sldId id="276"/>
           </p14:sldIdLst>
         </p14:section>
-        <p14:section name="Data limits" id="{8f2146bc-95a0-5c18-a1f5-b0408c7ee089}">
+        <p14:section name="Data limits" id="{91ff4eb4-2882-af25-d48f-bfecdbe53430}">
           <p14:sldIdLst>
             <p14:sldId id="277"/>
             <p14:sldId id="278"/>
@@ -4567,106 +4567,30 @@
           <a:chExt cx="0" cy="0"/>
         </a:xfrm>
       </p:grpSpPr>
-      <p:sp>
-        <p:nvSpPr>
-          <p:cNvPr id="2" name="Shape 0"/>
-          <p:cNvSpPr/>
-          <p:nvPr/>
-        </p:nvSpPr>
-        <p:spPr>
-          <a:xfrm>
-            <a:off x="365760" y="4626864"/>
-            <a:ext cx="384048" cy="384048"/>
-          </a:xfrm>
-          <a:prstGeom prst="rect">
-            <a:avLst/>
-          </a:prstGeom>
-          <a:solidFill>
-            <a:srgbClr val="0E2238"/>
-          </a:solidFill>
-          <a:ln w="9525">
-            <a:solidFill>
-              <a:srgbClr val="B5723B"/>
-            </a:solidFill>
-            <a:prstDash val="solid"/>
-          </a:ln>
-        </p:spPr>
-      </p:sp>
-      <p:sp>
-        <p:nvSpPr>
-          <p:cNvPr id="3" name="Text 1"/>
-          <p:cNvSpPr/>
-          <p:nvPr/>
-        </p:nvSpPr>
-        <p:spPr>
-          <a:xfrm>
-            <a:off x="365760" y="4626864"/>
-            <a:ext cx="384048" cy="384048"/>
-          </a:xfrm>
-          <a:prstGeom prst="rect">
-            <a:avLst/>
-          </a:prstGeom>
-          <a:noFill/>
-          <a:ln/>
-        </p:spPr>
-        <p:txBody>
-          <a:bodyPr wrap="square" lIns="0" tIns="0" rIns="0" bIns="0" rtlCol="0" anchor="ctr"/>
-          <a:lstStyle/>
-          <a:p>
-            <a:pPr algn="ctr" indent="0" marL="0">
-              <a:buNone/>
-            </a:pPr>
-            <a:r>
-              <a:rPr lang="en-US" sz="1000" b="1" dirty="0">
-                <a:solidFill>
-                  <a:srgbClr val="B5723B"/>
-                </a:solidFill>
-                <a:latin typeface="Cambria" pitchFamily="34" charset="0"/>
-                <a:ea typeface="Cambria" pitchFamily="34" charset="-122"/>
-                <a:cs typeface="Cambria" pitchFamily="34" charset="-120"/>
-              </a:rPr>
-              <a:t>RK</a:t>
-            </a:r>
-            <a:endParaRPr lang="en-US" sz="1000" dirty="0"/>
-          </a:p>
-        </p:txBody>
-      </p:sp>
-      <p:sp>
-        <p:nvSpPr>
-          <p:cNvPr id="4" name="Text 2"/>
-          <p:cNvSpPr/>
-          <p:nvPr/>
-        </p:nvSpPr>
-        <p:spPr>
-          <a:xfrm>
-            <a:off x="822960" y="4626864"/>
-            <a:ext cx="5120640" cy="384048"/>
-          </a:xfrm>
-          <a:prstGeom prst="rect">
-            <a:avLst/>
-          </a:prstGeom>
-          <a:noFill/>
-          <a:ln/>
-        </p:spPr>
-        <p:txBody>
-          <a:bodyPr wrap="square" lIns="0" tIns="0" rIns="0" bIns="0" rtlCol="0" anchor="ctr"/>
-          <a:lstStyle/>
-          <a:p>
-            <a:pPr algn="l" indent="0" marL="0">
-              <a:buNone/>
-            </a:pPr>
-            <a:r>
-              <a:rPr lang="en-US" sz="900" dirty="0">
-                <a:solidFill>
-                  <a:srgbClr val="D9B38C"/>
-                </a:solidFill>
-              </a:rPr>
-              <a:t>Rashid Alkaitoob Advocates &amp; Legal Consultants</a:t>
-            </a:r>
-            <a:endParaRPr lang="en-US" sz="900" dirty="0"/>
-          </a:p>
-        </p:txBody>
-      </p:sp>
+      <p:pic>
+        <p:nvPicPr>
+          <p:cNvPr id="2" name="Image 0" descr="/tmp/claude-0/-home-user-aa/b81485da-2e22-5d10-878f-01904e6d5dc6/scratchpad/rk/logo_dark.png">    </p:cNvPr>
+          <p:cNvPicPr>
+            <a:picLocks noChangeAspect="1"/>
+          </p:cNvPicPr>
+          <p:nvPr/>
+        </p:nvPicPr>
+        <p:blipFill>
+          <a:blip r:embed="rId1"/>
+          <a:stretch>
+            <a:fillRect/>
+          </a:stretch>
+        </p:blipFill>
+        <p:spPr>
+          <a:xfrm>
+            <a:off x="365760" y="4681728"/>
+            <a:ext cx="1675417" cy="274320"/>
+          </a:xfrm>
+          <a:prstGeom prst="rect">
+            <a:avLst/>
+          </a:prstGeom>
+        </p:spPr>
+      </p:pic>
       <p:sp>
         <p:nvSpPr>
           <p:cNvPr id="25" name="Slide Number Placeholder 0"/>
@@ -4744,112 +4668,36 @@
           <a:chExt cx="0" cy="0"/>
         </a:xfrm>
       </p:grpSpPr>
-      <p:sp>
-        <p:nvSpPr>
-          <p:cNvPr id="2" name="Shape 0"/>
-          <p:cNvSpPr/>
-          <p:nvPr/>
-        </p:nvSpPr>
-        <p:spPr>
-          <a:xfrm>
-            <a:off x="365760" y="4626864"/>
-            <a:ext cx="384048" cy="384048"/>
-          </a:xfrm>
-          <a:prstGeom prst="rect">
-            <a:avLst/>
-          </a:prstGeom>
-          <a:solidFill>
-            <a:srgbClr val="FFFFFF"/>
-          </a:solidFill>
-          <a:ln w="9525">
-            <a:solidFill>
-              <a:srgbClr val="B5723B"/>
-            </a:solidFill>
-            <a:prstDash val="solid"/>
-          </a:ln>
-        </p:spPr>
-      </p:sp>
-      <p:sp>
-        <p:nvSpPr>
-          <p:cNvPr id="3" name="Text 1"/>
-          <p:cNvSpPr/>
-          <p:nvPr/>
-        </p:nvSpPr>
-        <p:spPr>
-          <a:xfrm>
-            <a:off x="365760" y="4626864"/>
-            <a:ext cx="384048" cy="384048"/>
-          </a:xfrm>
-          <a:prstGeom prst="rect">
-            <a:avLst/>
-          </a:prstGeom>
-          <a:noFill/>
-          <a:ln/>
-        </p:spPr>
-        <p:txBody>
-          <a:bodyPr wrap="square" lIns="0" tIns="0" rIns="0" bIns="0" rtlCol="0" anchor="ctr"/>
-          <a:lstStyle/>
-          <a:p>
-            <a:pPr algn="ctr" indent="0" marL="0">
-              <a:buNone/>
-            </a:pPr>
-            <a:r>
-              <a:rPr lang="en-US" sz="1000" b="1" dirty="0">
-                <a:solidFill>
-                  <a:srgbClr val="B5723B"/>
-                </a:solidFill>
-                <a:latin typeface="Cambria" pitchFamily="34" charset="0"/>
-                <a:ea typeface="Cambria" pitchFamily="34" charset="-122"/>
-                <a:cs typeface="Cambria" pitchFamily="34" charset="-120"/>
-              </a:rPr>
-              <a:t>RK</a:t>
-            </a:r>
-            <a:endParaRPr lang="en-US" sz="1000" dirty="0"/>
-          </a:p>
-        </p:txBody>
-      </p:sp>
-      <p:sp>
-        <p:nvSpPr>
-          <p:cNvPr id="4" name="Text 2"/>
-          <p:cNvSpPr/>
-          <p:nvPr/>
-        </p:nvSpPr>
-        <p:spPr>
-          <a:xfrm>
-            <a:off x="822960" y="4626864"/>
-            <a:ext cx="5120640" cy="384048"/>
-          </a:xfrm>
-          <a:prstGeom prst="rect">
-            <a:avLst/>
-          </a:prstGeom>
-          <a:noFill/>
-          <a:ln/>
-        </p:spPr>
-        <p:txBody>
-          <a:bodyPr wrap="square" lIns="0" tIns="0" rIns="0" bIns="0" rtlCol="0" anchor="ctr"/>
-          <a:lstStyle/>
-          <a:p>
-            <a:pPr algn="l" indent="0" marL="0">
-              <a:buNone/>
-            </a:pPr>
-            <a:r>
-              <a:rPr lang="en-US" sz="900" dirty="0">
-                <a:solidFill>
-                  <a:srgbClr val="6E7B88"/>
-                </a:solidFill>
-              </a:rPr>
-              <a:t>Rashid Alkaitoob Advocates &amp; Legal Consultants</a:t>
-            </a:r>
-            <a:endParaRPr lang="en-US" sz="900" dirty="0"/>
-          </a:p>
-        </p:txBody>
-      </p:sp>
-      <p:sp>
-        <p:nvSpPr>
-          <p:cNvPr id="5" name="Text 3"/>
+      <p:pic>
+        <p:nvPicPr>
+          <p:cNvPr id="2" name="Image 0" descr="/tmp/claude-0/-home-user-aa/b81485da-2e22-5d10-878f-01904e6d5dc6/scratchpad/rk/logo_light.png">    </p:cNvPr>
+          <p:cNvPicPr>
+            <a:picLocks noChangeAspect="1"/>
+          </p:cNvPicPr>
+          <p:nvPr/>
+        </p:nvPicPr>
+        <p:blipFill>
+          <a:blip r:embed="rId1"/>
+          <a:stretch>
+            <a:fillRect/>
+          </a:stretch>
+        </p:blipFill>
+        <p:spPr>
+          <a:xfrm>
+            <a:off x="365760" y="4681728"/>
+            <a:ext cx="1675417" cy="274320"/>
+          </a:xfrm>
+          <a:prstGeom prst="rect">
+            <a:avLst/>
+          </a:prstGeom>
+        </p:spPr>
+      </p:pic>
+      <p:sp>
+        <p:nvSpPr>
+          <p:cNvPr id="3" name="Text 0"/>
           <p:cNvSpPr/>
           <p:nvPr>
-            <p:ph idx="103" type="title" hasCustomPrompt="1"/>
+            <p:ph idx="101" type="title" hasCustomPrompt="1"/>
           </p:nvPr>
         </p:nvSpPr>
         <p:spPr>
@@ -5332,41 +5180,40 @@
           </a:ln>
         </p:spPr>
       </p:sp>
-      <p:sp>
-        <p:nvSpPr>
-          <p:cNvPr id="3" name="Shape 1"/>
-          <p:cNvSpPr/>
-          <p:nvPr/>
-        </p:nvSpPr>
+      <p:pic>
+        <p:nvPicPr>
+          <p:cNvPr id="3" name="Image 0" descr="/tmp/claude-0/-home-user-aa/b81485da-2e22-5d10-878f-01904e6d5dc6/scratchpad/rk/logo_dark.png">    </p:cNvPr>
+          <p:cNvPicPr>
+            <a:picLocks noChangeAspect="1"/>
+          </p:cNvPicPr>
+          <p:nvPr/>
+        </p:nvPicPr>
+        <p:blipFill>
+          <a:blip r:embed="rId1"/>
+          <a:stretch>
+            <a:fillRect/>
+          </a:stretch>
+        </p:blipFill>
         <p:spPr>
           <a:xfrm>
             <a:off x="868680" y="868680"/>
-            <a:ext cx="822960" cy="822960"/>
-          </a:xfrm>
-          <a:prstGeom prst="rect">
-            <a:avLst/>
-          </a:prstGeom>
-          <a:solidFill>
-            <a:srgbClr val="0E2238"/>
-          </a:solidFill>
-          <a:ln w="12700">
-            <a:solidFill>
-              <a:srgbClr val="B5723B"/>
-            </a:solidFill>
-            <a:prstDash val="solid"/>
-          </a:ln>
-        </p:spPr>
-      </p:sp>
-      <p:sp>
-        <p:nvSpPr>
-          <p:cNvPr id="4" name="Text 2"/>
-          <p:cNvSpPr txBox="1"/>
-          <p:nvPr/>
-        </p:nvSpPr>
-        <p:spPr>
-          <a:xfrm>
-            <a:off x="868680" y="868680"/>
-            <a:ext cx="822960" cy="822960"/>
+            <a:ext cx="4021000" cy="658368"/>
+          </a:xfrm>
+          <a:prstGeom prst="rect">
+            <a:avLst/>
+          </a:prstGeom>
+        </p:spPr>
+      </p:pic>
+      <p:sp>
+        <p:nvSpPr>
+          <p:cNvPr id="4" name="Text 1"/>
+          <p:cNvSpPr txBox="1"/>
+          <p:nvPr/>
+        </p:nvSpPr>
+        <p:spPr>
+          <a:xfrm>
+            <a:off x="868680" y="1965960"/>
+            <a:ext cx="7406640" cy="1371600"/>
           </a:xfrm>
           <a:prstGeom prst="rect">
             <a:avLst/>
@@ -5378,93 +5225,18 @@
           <a:bodyPr wrap="square" lIns="0" tIns="0" rIns="0" bIns="0" rtlCol="0" anchor="ctr"/>
           <a:lstStyle/>
           <a:p>
-            <a:pPr algn="ctr" indent="0" marL="0">
-              <a:buNone/>
-            </a:pPr>
-            <a:r>
-              <a:rPr lang="en-US" sz="2400" b="1" dirty="0">
-                <a:solidFill>
-                  <a:schemeClr val="accent1"/>
+            <a:pPr algn="l" indent="0" marL="0">
+              <a:buNone/>
+            </a:pPr>
+            <a:r>
+              <a:rPr lang="en-US" altLang="en-US" sz="3200" b="1" dirty="0">
+                <a:solidFill>
+                  <a:schemeClr val="bg1"/>
                 </a:solidFill>
                 <a:latin typeface="Cambria" pitchFamily="34" charset="0"/>
                 <a:ea typeface="Cambria" pitchFamily="34" charset="-122"/>
                 <a:cs typeface="Cambria" pitchFamily="34" charset="-120"/>
               </a:rPr>
-              <a:t>RK</a:t>
-            </a:r>
-            <a:endParaRPr lang="en-US" sz="2400" dirty="0"/>
-          </a:p>
-        </p:txBody>
-      </p:sp>
-      <p:sp>
-        <p:nvSpPr>
-          <p:cNvPr id="5" name="Text 3"/>
-          <p:cNvSpPr txBox="1"/>
-          <p:nvPr/>
-        </p:nvSpPr>
-        <p:spPr>
-          <a:xfrm>
-            <a:off x="1874520" y="868680"/>
-            <a:ext cx="5943600" cy="822960"/>
-          </a:xfrm>
-          <a:prstGeom prst="rect">
-            <a:avLst/>
-          </a:prstGeom>
-          <a:noFill/>
-          <a:ln/>
-        </p:spPr>
-        <p:txBody>
-          <a:bodyPr wrap="square" lIns="0" tIns="0" rIns="0" bIns="0" rtlCol="0" anchor="ctr"/>
-          <a:lstStyle/>
-          <a:p>
-            <a:pPr algn="l" indent="0" marL="0">
-              <a:buNone/>
-            </a:pPr>
-            <a:r>
-              <a:rPr lang="en-US" altLang="en-US" sz="1200" dirty="0">
-                <a:solidFill>
-                  <a:schemeClr val="accent2"/>
-                </a:solidFill>
-              </a:rPr>
-              <a:t>Rashid Alkaitoob Advocates &amp; Legal Consultants</a:t>
-            </a:r>
-            <a:endParaRPr lang="en-US" sz="1200" dirty="0"/>
-          </a:p>
-        </p:txBody>
-      </p:sp>
-      <p:sp>
-        <p:nvSpPr>
-          <p:cNvPr id="6" name="Text 4"/>
-          <p:cNvSpPr txBox="1"/>
-          <p:nvPr/>
-        </p:nvSpPr>
-        <p:spPr>
-          <a:xfrm>
-            <a:off x="868680" y="1965960"/>
-            <a:ext cx="7406640" cy="1371600"/>
-          </a:xfrm>
-          <a:prstGeom prst="rect">
-            <a:avLst/>
-          </a:prstGeom>
-          <a:noFill/>
-          <a:ln/>
-        </p:spPr>
-        <p:txBody>
-          <a:bodyPr wrap="square" lIns="0" tIns="0" rIns="0" bIns="0" rtlCol="0" anchor="ctr"/>
-          <a:lstStyle/>
-          <a:p>
-            <a:pPr algn="l" indent="0" marL="0">
-              <a:buNone/>
-            </a:pPr>
-            <a:r>
-              <a:rPr lang="en-US" altLang="en-US" sz="3200" b="1" dirty="0">
-                <a:solidFill>
-                  <a:schemeClr val="bg1"/>
-                </a:solidFill>
-                <a:latin typeface="Cambria" pitchFamily="34" charset="0"/>
-                <a:ea typeface="Cambria" pitchFamily="34" charset="-122"/>
-                <a:cs typeface="Cambria" pitchFamily="34" charset="-120"/>
-              </a:rPr>
               <a:t>Wills and Inheritance in the UAE: What the Numbers Say</a:t>
             </a:r>
             <a:endParaRPr lang="en-US" sz="3200" dirty="0"/>
@@ -5473,7 +5245,7 @@
       </p:sp>
       <p:sp>
         <p:nvSpPr>
-          <p:cNvPr id="7" name="Text 5"/>
+          <p:cNvPr id="5" name="Text 2"/>
           <p:cNvSpPr txBox="1"/>
           <p:nvPr/>
         </p:nvSpPr>
@@ -5509,7 +5281,7 @@
       </p:sp>
       <p:sp>
         <p:nvSpPr>
-          <p:cNvPr id="8" name="Text 6"/>
+          <p:cNvPr id="6" name="Text 3"/>
           <p:cNvSpPr txBox="1"/>
           <p:nvPr/>
         </p:nvSpPr>
@@ -5878,10 +5650,10 @@
       </p:sp>
       <p:sp>
         <p:nvSpPr>
-          <p:cNvPr id="10" name="Text 3"/>
+          <p:cNvPr id="10" name="Text 0"/>
           <p:cNvSpPr/>
           <p:nvPr>
-            <p:ph idx="103" type="title" hasCustomPrompt="1"/>
+            <p:ph idx="101" type="title" hasCustomPrompt="1"/>
           </p:nvPr>
         </p:nvSpPr>
         <p:spPr>
@@ -6569,10 +6341,10 @@
       </p:sp>
       <p:sp>
         <p:nvSpPr>
-          <p:cNvPr id="17" name="Text 3"/>
+          <p:cNvPr id="17" name="Text 0"/>
           <p:cNvSpPr/>
           <p:nvPr>
-            <p:ph idx="103" type="title" hasCustomPrompt="1"/>
+            <p:ph idx="101" type="title" hasCustomPrompt="1"/>
           </p:nvPr>
         </p:nvSpPr>
         <p:spPr>
@@ -8927,10 +8699,10 @@
       </p:sp>
       <p:sp>
         <p:nvSpPr>
-          <p:cNvPr id="6" name="Text 3"/>
+          <p:cNvPr id="6" name="Text 0"/>
           <p:cNvSpPr/>
           <p:nvPr>
-            <p:ph idx="103" type="title" hasCustomPrompt="1"/>
+            <p:ph idx="101" type="title" hasCustomPrompt="1"/>
           </p:nvPr>
         </p:nvSpPr>
         <p:spPr>
@@ -9290,10 +9062,10 @@
       </p:sp>
       <p:sp>
         <p:nvSpPr>
-          <p:cNvPr id="10" name="Text 3"/>
+          <p:cNvPr id="10" name="Text 0"/>
           <p:cNvSpPr/>
           <p:nvPr>
-            <p:ph idx="103" type="title" hasCustomPrompt="1"/>
+            <p:ph idx="101" type="title" hasCustomPrompt="1"/>
           </p:nvPr>
         </p:nvSpPr>
         <p:spPr>
@@ -9825,10 +9597,10 @@
       </p:sp>
       <p:sp>
         <p:nvSpPr>
-          <p:cNvPr id="13" name="Text 3"/>
+          <p:cNvPr id="13" name="Text 0"/>
           <p:cNvSpPr/>
           <p:nvPr>
-            <p:ph idx="103" type="title" hasCustomPrompt="1"/>
+            <p:ph idx="101" type="title" hasCustomPrompt="1"/>
           </p:nvPr>
         </p:nvSpPr>
         <p:spPr>
@@ -10525,10 +10297,10 @@
       </p:sp>
       <p:sp>
         <p:nvSpPr>
-          <p:cNvPr id="19" name="Text 3"/>
+          <p:cNvPr id="19" name="Text 0"/>
           <p:cNvSpPr/>
           <p:nvPr>
-            <p:ph idx="103" type="title" hasCustomPrompt="1"/>
+            <p:ph idx="101" type="title" hasCustomPrompt="1"/>
           </p:nvPr>
         </p:nvSpPr>
         <p:spPr>
@@ -11400,10 +11172,10 @@
       </p:sp>
       <p:sp>
         <p:nvSpPr>
-          <p:cNvPr id="17" name="Text 3"/>
+          <p:cNvPr id="17" name="Text 0"/>
           <p:cNvSpPr/>
           <p:nvPr>
-            <p:ph idx="103" type="title" hasCustomPrompt="1"/>
+            <p:ph idx="101" type="title" hasCustomPrompt="1"/>
           </p:nvPr>
         </p:nvSpPr>
         <p:spPr>
@@ -12091,10 +11863,10 @@
       </p:sp>
       <p:sp>
         <p:nvSpPr>
-          <p:cNvPr id="17" name="Text 3"/>
+          <p:cNvPr id="17" name="Text 0"/>
           <p:cNvSpPr/>
           <p:nvPr>
-            <p:ph idx="103" type="title" hasCustomPrompt="1"/>
+            <p:ph idx="101" type="title" hasCustomPrompt="1"/>
           </p:nvPr>
         </p:nvSpPr>
         <p:spPr>
@@ -12454,10 +12226,10 @@
       </p:sp>
       <p:sp>
         <p:nvSpPr>
-          <p:cNvPr id="10" name="Text 3"/>
+          <p:cNvPr id="10" name="Text 0"/>
           <p:cNvSpPr/>
           <p:nvPr>
-            <p:ph idx="103" type="title" hasCustomPrompt="1"/>
+            <p:ph idx="101" type="title" hasCustomPrompt="1"/>
           </p:nvPr>
         </p:nvSpPr>
         <p:spPr>
@@ -13154,10 +12926,10 @@
       </p:sp>
       <p:sp>
         <p:nvSpPr>
-          <p:cNvPr id="19" name="Text 3"/>
+          <p:cNvPr id="19" name="Text 0"/>
           <p:cNvSpPr/>
           <p:nvPr>
-            <p:ph idx="103" type="title" hasCustomPrompt="1"/>
+            <p:ph idx="101" type="title" hasCustomPrompt="1"/>
           </p:nvPr>
         </p:nvSpPr>
         <p:spPr>
@@ -13873,10 +13645,10 @@
       </p:sp>
       <p:sp>
         <p:nvSpPr>
-          <p:cNvPr id="12" name="Text 3"/>
+          <p:cNvPr id="12" name="Text 0"/>
           <p:cNvSpPr/>
           <p:nvPr>
-            <p:ph idx="103" type="title" hasCustomPrompt="1"/>
+            <p:ph idx="101" type="title" hasCustomPrompt="1"/>
           </p:nvPr>
         </p:nvSpPr>
         <p:spPr>
@@ -15434,10 +15206,10 @@
       </p:sp>
       <p:sp>
         <p:nvSpPr>
-          <p:cNvPr id="41" name="Text 3"/>
+          <p:cNvPr id="41" name="Text 0"/>
           <p:cNvSpPr/>
           <p:nvPr>
-            <p:ph idx="103" type="title" hasCustomPrompt="1"/>
+            <p:ph idx="101" type="title" hasCustomPrompt="1"/>
           </p:nvPr>
         </p:nvSpPr>
         <p:spPr>
@@ -16077,42 +15849,6 @@
       </p:sp>
       <p:sp>
         <p:nvSpPr>
-          <p:cNvPr id="13" name="Text 7"/>
-          <p:cNvSpPr txBox="1"/>
-          <p:nvPr/>
-        </p:nvSpPr>
-        <p:spPr>
-          <a:xfrm>
-            <a:off x="868680" y="4206240"/>
-            <a:ext cx="7406640" cy="365760"/>
-          </a:xfrm>
-          <a:prstGeom prst="rect">
-            <a:avLst/>
-          </a:prstGeom>
-          <a:noFill/>
-          <a:ln/>
-        </p:spPr>
-        <p:txBody>
-          <a:bodyPr wrap="square" lIns="0" tIns="0" rIns="0" bIns="0" rtlCol="0" anchor="ctr"/>
-          <a:lstStyle/>
-          <a:p>
-            <a:pPr algn="l" indent="0" marL="0">
-              <a:buNone/>
-            </a:pPr>
-            <a:r>
-              <a:rPr lang="en-US" altLang="en-US" sz="1000" dirty="0">
-                <a:solidFill>
-                  <a:schemeClr val="accent1"/>
-                </a:solidFill>
-              </a:rPr>
-              <a:t>Rashid Alkaitoob Advocates &amp; Legal Consultants</a:t>
-            </a:r>
-            <a:endParaRPr lang="en-US" sz="1000" dirty="0"/>
-          </a:p>
-        </p:txBody>
-      </p:sp>
-      <p:sp>
-        <p:nvSpPr>
           <p:cNvPr id="25" name="Slide Number Placeholder 0"/>
           <p:cNvSpPr>
             <a:spLocks noGrp="1"/>
@@ -16810,10 +16546,10 @@
       </p:sp>
       <p:sp>
         <p:nvSpPr>
-          <p:cNvPr id="21" name="Text 3"/>
+          <p:cNvPr id="21" name="Text 0"/>
           <p:cNvSpPr/>
           <p:nvPr>
-            <p:ph idx="103" type="title" hasCustomPrompt="1"/>
+            <p:ph idx="101" type="title" hasCustomPrompt="1"/>
           </p:nvPr>
         </p:nvSpPr>
         <p:spPr>
@@ -17357,10 +17093,10 @@
       </p:sp>
       <p:sp>
         <p:nvSpPr>
-          <p:cNvPr id="10" name="Text 3"/>
+          <p:cNvPr id="10" name="Text 0"/>
           <p:cNvSpPr/>
           <p:nvPr>
-            <p:ph idx="103" type="title" hasCustomPrompt="1"/>
+            <p:ph idx="101" type="title" hasCustomPrompt="1"/>
           </p:nvPr>
         </p:nvSpPr>
         <p:spPr>
@@ -18555,10 +18291,10 @@
       </p:sp>
       <p:sp>
         <p:nvSpPr>
-          <p:cNvPr id="29" name="Text 3"/>
+          <p:cNvPr id="29" name="Text 0"/>
           <p:cNvSpPr/>
           <p:nvPr>
-            <p:ph idx="103" type="title" hasCustomPrompt="1"/>
+            <p:ph idx="101" type="title" hasCustomPrompt="1"/>
           </p:nvPr>
         </p:nvSpPr>
         <p:spPr>
@@ -18918,10 +18654,10 @@
       </p:sp>
       <p:sp>
         <p:nvSpPr>
-          <p:cNvPr id="10" name="Text 3"/>
+          <p:cNvPr id="10" name="Text 0"/>
           <p:cNvSpPr/>
           <p:nvPr>
-            <p:ph idx="103" type="title" hasCustomPrompt="1"/>
+            <p:ph idx="101" type="title" hasCustomPrompt="1"/>
           </p:nvPr>
         </p:nvSpPr>
         <p:spPr>
@@ -19295,10 +19031,10 @@
       </p:sp>
       <p:sp>
         <p:nvSpPr>
-          <p:cNvPr id="10" name="Text 3"/>
+          <p:cNvPr id="10" name="Text 0"/>
           <p:cNvSpPr/>
           <p:nvPr>
-            <p:ph idx="103" type="title" hasCustomPrompt="1"/>
+            <p:ph idx="101" type="title" hasCustomPrompt="1"/>
           </p:nvPr>
         </p:nvSpPr>
         <p:spPr>

--- a/presentations/06_UAE_Wills_Inheritance_Statistics_EN.pptx
+++ b/presentations/06_UAE_Wills_Inheritance_Statistics_EN.pptx
@@ -132,20 +132,20 @@
   <p:extLst>
     <p:ext uri="{521415D9-36F7-43E2-AB2F-B90AF26B5E84}">
       <p14:sectionLst xmlns:p14="http://schemas.microsoft.com/office/powerpoint/2010/main">
-        <p14:section name="Introduction" id="{83cc0e1b-3a69-30d9-b059-d20c6580c931}">
+        <p14:section name="Introduction" id="{8cfdfe2d-52bc-8362-6c3f-3a7fbb08cdc0}">
           <p14:sldIdLst>
             <p14:sldId id="256"/>
             <p14:sldId id="257"/>
             <p14:sldId id="258"/>
           </p14:sldIdLst>
         </p14:section>
-        <p14:section name="Context" id="{ef3a0b54-7c8a-8cfd-1f7d-1cedb7549539}">
+        <p14:section name="Context" id="{23e1e2f6-b234-0c2b-529b-e6655a5b2b82}">
           <p14:sldIdLst>
             <p14:sldId id="259"/>
             <p14:sldId id="260"/>
           </p14:sldIdLst>
         </p14:section>
-        <p14:section name="Who has a will" id="{1edc1789-a872-a662-95a9-d191244bcfba}">
+        <p14:section name="Who has a will" id="{95d6993a-aacb-bdc4-8c8c-8623aa17a3de}">
           <p14:sldIdLst>
             <p14:sldId id="261"/>
             <p14:sldId id="262"/>
@@ -156,7 +156,7 @@
             <p14:sldId id="267"/>
           </p14:sldIdLst>
         </p14:section>
-        <p14:section name="Speed and problems" id="{2bf7b067-4d94-b2ae-5cf4-3f5ec58ebd2c}">
+        <p14:section name="Speed and problems" id="{adc08b58-6886-ee9a-6566-4ff424005afb}">
           <p14:sldIdLst>
             <p14:sldId id="268"/>
             <p14:sldId id="269"/>
@@ -165,7 +165,7 @@
             <p14:sldId id="272"/>
           </p14:sldIdLst>
         </p14:section>
-        <p14:section name="Companies" id="{e109a78d-e683-2de9-5ff3-d409d51bb54e}">
+        <p14:section name="Companies" id="{40656999-1133-1896-2fc3-86bb294016c3}">
           <p14:sldIdLst>
             <p14:sldId id="273"/>
             <p14:sldId id="274"/>
@@ -173,7 +173,7 @@
             <p14:sldId id="276"/>
           </p14:sldIdLst>
         </p14:section>
-        <p14:section name="Data limits" id="{91ff4eb4-2882-af25-d48f-bfecdbe53430}">
+        <p14:section name="Data limits" id="{c9648b25-557d-58ef-0cc8-c0c2027ee90f}">
           <p14:sldIdLst>
             <p14:sldId id="277"/>
             <p14:sldId id="278"/>
